--- a/Defensa_Caso_DBA_PuntoNet.pptx
+++ b/Defensa_Caso_DBA_PuntoNet.pptx
@@ -134,7 +134,7 @@
 <file path=ppt/revisionInfo.xml><?xml version="1.0" encoding="utf-8"?>
 <p1510:revInfo xmlns:a="http://schemas.openxmlformats.org/drawingml/2006/main" xmlns:r="http://schemas.openxmlformats.org/officeDocument/2006/relationships" xmlns:p1510="http://schemas.microsoft.com/office/powerpoint/2015/10/main">
   <p1510:revLst>
-    <p1510:client id="{32C648C3-4146-45C8-8AC1-81EAC208F0D3}" v="20" dt="2026-09-16T22:27:07.732"/>
+    <p1510:client id="{32C648C3-4146-45C8-8AC1-81EAC208F0D3}" v="27" dt="2026-09-17T16:35:34.179"/>
   </p1510:revLst>
 </p1510:revInfo>
 </file>
@@ -144,18 +144,18 @@
   <pc:docChgLst>
     <pc:chgData name="Sandra Elizabeth Villamarin Mendez" userId="aec40f8d-d04b-44fb-9d76-6d86c6acb92d" providerId="ADAL" clId="{543B53C6-AB9C-4B6F-AC93-78F0324FCE23}"/>
     <pc:docChg chg="undo custSel modSld">
-      <pc:chgData name="Sandra Elizabeth Villamarin Mendez" userId="aec40f8d-d04b-44fb-9d76-6d86c6acb92d" providerId="ADAL" clId="{543B53C6-AB9C-4B6F-AC93-78F0324FCE23}" dt="2026-09-16T22:27:46.710" v="1454" actId="1076"/>
+      <pc:chgData name="Sandra Elizabeth Villamarin Mendez" userId="aec40f8d-d04b-44fb-9d76-6d86c6acb92d" providerId="ADAL" clId="{543B53C6-AB9C-4B6F-AC93-78F0324FCE23}" dt="2026-09-17T16:59:39.522" v="1738" actId="20577"/>
       <pc:docMkLst>
         <pc:docMk/>
       </pc:docMkLst>
-      <pc:sldChg chg="modSp mod">
-        <pc:chgData name="Sandra Elizabeth Villamarin Mendez" userId="aec40f8d-d04b-44fb-9d76-6d86c6acb92d" providerId="ADAL" clId="{543B53C6-AB9C-4B6F-AC93-78F0324FCE23}" dt="2026-09-16T18:00:49.604" v="159" actId="20577"/>
+      <pc:sldChg chg="addSp delSp modSp mod">
+        <pc:chgData name="Sandra Elizabeth Villamarin Mendez" userId="aec40f8d-d04b-44fb-9d76-6d86c6acb92d" providerId="ADAL" clId="{543B53C6-AB9C-4B6F-AC93-78F0324FCE23}" dt="2026-09-17T16:43:13.550" v="1726" actId="20577"/>
         <pc:sldMkLst>
           <pc:docMk/>
           <pc:sldMk cId="0" sldId="258"/>
         </pc:sldMkLst>
         <pc:spChg chg="mod">
-          <ac:chgData name="Sandra Elizabeth Villamarin Mendez" userId="aec40f8d-d04b-44fb-9d76-6d86c6acb92d" providerId="ADAL" clId="{543B53C6-AB9C-4B6F-AC93-78F0324FCE23}" dt="2026-09-16T17:56:04.739" v="52" actId="20577"/>
+          <ac:chgData name="Sandra Elizabeth Villamarin Mendez" userId="aec40f8d-d04b-44fb-9d76-6d86c6acb92d" providerId="ADAL" clId="{543B53C6-AB9C-4B6F-AC93-78F0324FCE23}" dt="2026-09-17T16:43:13.550" v="1726" actId="20577"/>
           <ac:spMkLst>
             <pc:docMk/>
             <pc:sldMk cId="0" sldId="258"/>
@@ -194,9 +194,17 @@
             <ac:spMk id="27" creationId="{00000000-0000-0000-0000-000000000000}"/>
           </ac:spMkLst>
         </pc:spChg>
+        <pc:spChg chg="add del mod">
+          <ac:chgData name="Sandra Elizabeth Villamarin Mendez" userId="aec40f8d-d04b-44fb-9d76-6d86c6acb92d" providerId="ADAL" clId="{543B53C6-AB9C-4B6F-AC93-78F0324FCE23}" dt="2026-09-17T16:19:04.237" v="1500"/>
+          <ac:spMkLst>
+            <pc:docMk/>
+            <pc:sldMk cId="0" sldId="258"/>
+            <ac:spMk id="30" creationId="{5918332E-BA83-56F8-6230-927D1354ED9E}"/>
+          </ac:spMkLst>
+        </pc:spChg>
       </pc:sldChg>
       <pc:sldChg chg="addSp delSp modSp mod">
-        <pc:chgData name="Sandra Elizabeth Villamarin Mendez" userId="aec40f8d-d04b-44fb-9d76-6d86c6acb92d" providerId="ADAL" clId="{543B53C6-AB9C-4B6F-AC93-78F0324FCE23}" dt="2026-09-16T19:50:09.405" v="417" actId="20577"/>
+        <pc:chgData name="Sandra Elizabeth Villamarin Mendez" userId="aec40f8d-d04b-44fb-9d76-6d86c6acb92d" providerId="ADAL" clId="{543B53C6-AB9C-4B6F-AC93-78F0324FCE23}" dt="2026-09-17T16:47:31.232" v="1731" actId="108"/>
         <pc:sldMkLst>
           <pc:docMk/>
           <pc:sldMk cId="0" sldId="259"/>
@@ -218,7 +226,7 @@
           </ac:spMkLst>
         </pc:spChg>
         <pc:spChg chg="add del mod">
-          <ac:chgData name="Sandra Elizabeth Villamarin Mendez" userId="aec40f8d-d04b-44fb-9d76-6d86c6acb92d" providerId="ADAL" clId="{543B53C6-AB9C-4B6F-AC93-78F0324FCE23}" dt="2026-09-16T19:47:35.870" v="173" actId="113"/>
+          <ac:chgData name="Sandra Elizabeth Villamarin Mendez" userId="aec40f8d-d04b-44fb-9d76-6d86c6acb92d" providerId="ADAL" clId="{543B53C6-AB9C-4B6F-AC93-78F0324FCE23}" dt="2026-09-17T16:47:31.232" v="1731" actId="108"/>
           <ac:spMkLst>
             <pc:docMk/>
             <pc:sldMk cId="0" sldId="259"/>
@@ -329,14 +337,22 @@
           </ac:picMkLst>
         </pc:picChg>
       </pc:sldChg>
-      <pc:sldChg chg="modSp mod">
-        <pc:chgData name="Sandra Elizabeth Villamarin Mendez" userId="aec40f8d-d04b-44fb-9d76-6d86c6acb92d" providerId="ADAL" clId="{543B53C6-AB9C-4B6F-AC93-78F0324FCE23}" dt="2026-09-16T20:08:06.176" v="496"/>
+      <pc:sldChg chg="delSp modSp mod">
+        <pc:chgData name="Sandra Elizabeth Villamarin Mendez" userId="aec40f8d-d04b-44fb-9d76-6d86c6acb92d" providerId="ADAL" clId="{543B53C6-AB9C-4B6F-AC93-78F0324FCE23}" dt="2026-09-17T16:52:44.874" v="1734" actId="478"/>
         <pc:sldMkLst>
           <pc:docMk/>
           <pc:sldMk cId="0" sldId="262"/>
         </pc:sldMkLst>
-        <pc:spChg chg="mod">
-          <ac:chgData name="Sandra Elizabeth Villamarin Mendez" userId="aec40f8d-d04b-44fb-9d76-6d86c6acb92d" providerId="ADAL" clId="{543B53C6-AB9C-4B6F-AC93-78F0324FCE23}" dt="2026-09-16T20:08:06.176" v="496"/>
+        <pc:spChg chg="del">
+          <ac:chgData name="Sandra Elizabeth Villamarin Mendez" userId="aec40f8d-d04b-44fb-9d76-6d86c6acb92d" providerId="ADAL" clId="{543B53C6-AB9C-4B6F-AC93-78F0324FCE23}" dt="2026-09-17T16:52:44.874" v="1734" actId="478"/>
+          <ac:spMkLst>
+            <pc:docMk/>
+            <pc:sldMk cId="0" sldId="262"/>
+            <ac:spMk id="43" creationId="{00000000-0000-0000-0000-000000000000}"/>
+          </ac:spMkLst>
+        </pc:spChg>
+        <pc:spChg chg="del mod">
+          <ac:chgData name="Sandra Elizabeth Villamarin Mendez" userId="aec40f8d-d04b-44fb-9d76-6d86c6acb92d" providerId="ADAL" clId="{543B53C6-AB9C-4B6F-AC93-78F0324FCE23}" dt="2026-09-17T16:52:43.176" v="1733" actId="478"/>
           <ac:spMkLst>
             <pc:docMk/>
             <pc:sldMk cId="0" sldId="262"/>
@@ -368,11 +384,19 @@
         </pc:spChg>
       </pc:sldChg>
       <pc:sldChg chg="addSp modSp mod">
-        <pc:chgData name="Sandra Elizabeth Villamarin Mendez" userId="aec40f8d-d04b-44fb-9d76-6d86c6acb92d" providerId="ADAL" clId="{543B53C6-AB9C-4B6F-AC93-78F0324FCE23}" dt="2026-09-16T20:35:40.464" v="603" actId="20577"/>
+        <pc:chgData name="Sandra Elizabeth Villamarin Mendez" userId="aec40f8d-d04b-44fb-9d76-6d86c6acb92d" providerId="ADAL" clId="{543B53C6-AB9C-4B6F-AC93-78F0324FCE23}" dt="2026-09-17T16:59:39.522" v="1738" actId="20577"/>
         <pc:sldMkLst>
           <pc:docMk/>
           <pc:sldMk cId="0" sldId="264"/>
         </pc:sldMkLst>
+        <pc:spChg chg="mod">
+          <ac:chgData name="Sandra Elizabeth Villamarin Mendez" userId="aec40f8d-d04b-44fb-9d76-6d86c6acb92d" providerId="ADAL" clId="{543B53C6-AB9C-4B6F-AC93-78F0324FCE23}" dt="2026-09-17T16:59:39.522" v="1738" actId="20577"/>
+          <ac:spMkLst>
+            <pc:docMk/>
+            <pc:sldMk cId="0" sldId="264"/>
+            <ac:spMk id="7" creationId="{00000000-0000-0000-0000-000000000000}"/>
+          </ac:spMkLst>
+        </pc:spChg>
         <pc:spChg chg="mod">
           <ac:chgData name="Sandra Elizabeth Villamarin Mendez" userId="aec40f8d-d04b-44fb-9d76-6d86c6acb92d" providerId="ADAL" clId="{543B53C6-AB9C-4B6F-AC93-78F0324FCE23}" dt="2026-09-16T20:27:16.616" v="531" actId="20577"/>
           <ac:spMkLst>
@@ -454,13 +478,13 @@
         </pc:picChg>
       </pc:sldChg>
       <pc:sldChg chg="modSp mod">
-        <pc:chgData name="Sandra Elizabeth Villamarin Mendez" userId="aec40f8d-d04b-44fb-9d76-6d86c6acb92d" providerId="ADAL" clId="{543B53C6-AB9C-4B6F-AC93-78F0324FCE23}" dt="2026-09-16T21:09:37.749" v="845" actId="20577"/>
+        <pc:chgData name="Sandra Elizabeth Villamarin Mendez" userId="aec40f8d-d04b-44fb-9d76-6d86c6acb92d" providerId="ADAL" clId="{543B53C6-AB9C-4B6F-AC93-78F0324FCE23}" dt="2026-09-17T04:01:33.753" v="1490" actId="20577"/>
         <pc:sldMkLst>
           <pc:docMk/>
           <pc:sldMk cId="0" sldId="266"/>
         </pc:sldMkLst>
         <pc:spChg chg="mod">
-          <ac:chgData name="Sandra Elizabeth Villamarin Mendez" userId="aec40f8d-d04b-44fb-9d76-6d86c6acb92d" providerId="ADAL" clId="{543B53C6-AB9C-4B6F-AC93-78F0324FCE23}" dt="2026-09-16T20:57:10.998" v="708" actId="20577"/>
+          <ac:chgData name="Sandra Elizabeth Villamarin Mendez" userId="aec40f8d-d04b-44fb-9d76-6d86c6acb92d" providerId="ADAL" clId="{543B53C6-AB9C-4B6F-AC93-78F0324FCE23}" dt="2026-09-17T04:01:24.663" v="1485" actId="20577"/>
           <ac:spMkLst>
             <pc:docMk/>
             <pc:sldMk cId="0" sldId="266"/>
@@ -468,7 +492,7 @@
           </ac:spMkLst>
         </pc:spChg>
         <pc:spChg chg="mod">
-          <ac:chgData name="Sandra Elizabeth Villamarin Mendez" userId="aec40f8d-d04b-44fb-9d76-6d86c6acb92d" providerId="ADAL" clId="{543B53C6-AB9C-4B6F-AC93-78F0324FCE23}" dt="2026-09-16T21:00:45.086" v="788" actId="6549"/>
+          <ac:chgData name="Sandra Elizabeth Villamarin Mendez" userId="aec40f8d-d04b-44fb-9d76-6d86c6acb92d" providerId="ADAL" clId="{543B53C6-AB9C-4B6F-AC93-78F0324FCE23}" dt="2026-09-17T04:01:33.753" v="1490" actId="20577"/>
           <ac:spMkLst>
             <pc:docMk/>
             <pc:sldMk cId="0" sldId="266"/>
@@ -640,7 +664,7 @@
         </pc:spChg>
       </pc:sldChg>
       <pc:sldChg chg="modSp mod">
-        <pc:chgData name="Sandra Elizabeth Villamarin Mendez" userId="aec40f8d-d04b-44fb-9d76-6d86c6acb92d" providerId="ADAL" clId="{543B53C6-AB9C-4B6F-AC93-78F0324FCE23}" dt="2026-09-16T22:07:21.352" v="1206" actId="403"/>
+        <pc:chgData name="Sandra Elizabeth Villamarin Mendez" userId="aec40f8d-d04b-44fb-9d76-6d86c6acb92d" providerId="ADAL" clId="{543B53C6-AB9C-4B6F-AC93-78F0324FCE23}" dt="2026-09-17T16:23:43.088" v="1539" actId="20577"/>
         <pc:sldMkLst>
           <pc:docMk/>
           <pc:sldMk cId="0" sldId="272"/>
@@ -686,7 +710,7 @@
           </ac:spMkLst>
         </pc:spChg>
         <pc:spChg chg="mod">
-          <ac:chgData name="Sandra Elizabeth Villamarin Mendez" userId="aec40f8d-d04b-44fb-9d76-6d86c6acb92d" providerId="ADAL" clId="{543B53C6-AB9C-4B6F-AC93-78F0324FCE23}" dt="2026-09-16T22:07:21.352" v="1206" actId="403"/>
+          <ac:chgData name="Sandra Elizabeth Villamarin Mendez" userId="aec40f8d-d04b-44fb-9d76-6d86c6acb92d" providerId="ADAL" clId="{543B53C6-AB9C-4B6F-AC93-78F0324FCE23}" dt="2026-09-17T16:23:43.088" v="1539" actId="20577"/>
           <ac:spMkLst>
             <pc:docMk/>
             <pc:sldMk cId="0" sldId="272"/>
@@ -694,12 +718,20 @@
           </ac:spMkLst>
         </pc:spChg>
       </pc:sldChg>
-      <pc:sldChg chg="modSp mod">
-        <pc:chgData name="Sandra Elizabeth Villamarin Mendez" userId="aec40f8d-d04b-44fb-9d76-6d86c6acb92d" providerId="ADAL" clId="{543B53C6-AB9C-4B6F-AC93-78F0324FCE23}" dt="2026-09-16T22:10:35.146" v="1223" actId="403"/>
+      <pc:sldChg chg="addSp delSp modSp mod">
+        <pc:chgData name="Sandra Elizabeth Villamarin Mendez" userId="aec40f8d-d04b-44fb-9d76-6d86c6acb92d" providerId="ADAL" clId="{543B53C6-AB9C-4B6F-AC93-78F0324FCE23}" dt="2026-09-17T16:31:52.555" v="1692" actId="14100"/>
         <pc:sldMkLst>
           <pc:docMk/>
           <pc:sldMk cId="0" sldId="273"/>
         </pc:sldMkLst>
+        <pc:spChg chg="mod">
+          <ac:chgData name="Sandra Elizabeth Villamarin Mendez" userId="aec40f8d-d04b-44fb-9d76-6d86c6acb92d" providerId="ADAL" clId="{543B53C6-AB9C-4B6F-AC93-78F0324FCE23}" dt="2026-09-17T16:28:57.570" v="1657" actId="20577"/>
+          <ac:spMkLst>
+            <pc:docMk/>
+            <pc:sldMk cId="0" sldId="273"/>
+            <ac:spMk id="5" creationId="{00000000-0000-0000-0000-000000000000}"/>
+          </ac:spMkLst>
+        </pc:spChg>
         <pc:spChg chg="mod">
           <ac:chgData name="Sandra Elizabeth Villamarin Mendez" userId="aec40f8d-d04b-44fb-9d76-6d86c6acb92d" providerId="ADAL" clId="{543B53C6-AB9C-4B6F-AC93-78F0324FCE23}" dt="2026-09-16T22:10:35.146" v="1223" actId="403"/>
           <ac:spMkLst>
@@ -709,11 +741,27 @@
           </ac:spMkLst>
         </pc:spChg>
         <pc:spChg chg="mod">
-          <ac:chgData name="Sandra Elizabeth Villamarin Mendez" userId="aec40f8d-d04b-44fb-9d76-6d86c6acb92d" providerId="ADAL" clId="{543B53C6-AB9C-4B6F-AC93-78F0324FCE23}" dt="2026-09-16T22:10:35.146" v="1223" actId="403"/>
+          <ac:chgData name="Sandra Elizabeth Villamarin Mendez" userId="aec40f8d-d04b-44fb-9d76-6d86c6acb92d" providerId="ADAL" clId="{543B53C6-AB9C-4B6F-AC93-78F0324FCE23}" dt="2026-09-17T16:28:32.280" v="1655" actId="20577"/>
           <ac:spMkLst>
             <pc:docMk/>
             <pc:sldMk cId="0" sldId="273"/>
             <ac:spMk id="7" creationId="{00000000-0000-0000-0000-000000000000}"/>
+          </ac:spMkLst>
+        </pc:spChg>
+        <pc:spChg chg="mod">
+          <ac:chgData name="Sandra Elizabeth Villamarin Mendez" userId="aec40f8d-d04b-44fb-9d76-6d86c6acb92d" providerId="ADAL" clId="{543B53C6-AB9C-4B6F-AC93-78F0324FCE23}" dt="2026-09-17T16:31:52.555" v="1692" actId="14100"/>
+          <ac:spMkLst>
+            <pc:docMk/>
+            <pc:sldMk cId="0" sldId="273"/>
+            <ac:spMk id="8" creationId="{00000000-0000-0000-0000-000000000000}"/>
+          </ac:spMkLst>
+        </pc:spChg>
+        <pc:spChg chg="add del mod">
+          <ac:chgData name="Sandra Elizabeth Villamarin Mendez" userId="aec40f8d-d04b-44fb-9d76-6d86c6acb92d" providerId="ADAL" clId="{543B53C6-AB9C-4B6F-AC93-78F0324FCE23}" dt="2026-09-17T16:29:04.260" v="1661" actId="20577"/>
+          <ac:spMkLst>
+            <pc:docMk/>
+            <pc:sldMk cId="0" sldId="273"/>
+            <ac:spMk id="10" creationId="{00000000-0000-0000-0000-000000000000}"/>
           </ac:spMkLst>
         </pc:spChg>
         <pc:spChg chg="mod">
@@ -725,7 +773,7 @@
           </ac:spMkLst>
         </pc:spChg>
         <pc:spChg chg="mod">
-          <ac:chgData name="Sandra Elizabeth Villamarin Mendez" userId="aec40f8d-d04b-44fb-9d76-6d86c6acb92d" providerId="ADAL" clId="{543B53C6-AB9C-4B6F-AC93-78F0324FCE23}" dt="2026-09-16T22:10:35.146" v="1223" actId="403"/>
+          <ac:chgData name="Sandra Elizabeth Villamarin Mendez" userId="aec40f8d-d04b-44fb-9d76-6d86c6acb92d" providerId="ADAL" clId="{543B53C6-AB9C-4B6F-AC93-78F0324FCE23}" dt="2026-09-17T16:31:46.620" v="1691" actId="14100"/>
           <ac:spMkLst>
             <pc:docMk/>
             <pc:sldMk cId="0" sldId="273"/>
@@ -734,13 +782,13 @@
         </pc:spChg>
       </pc:sldChg>
       <pc:sldChg chg="delSp modSp mod">
-        <pc:chgData name="Sandra Elizabeth Villamarin Mendez" userId="aec40f8d-d04b-44fb-9d76-6d86c6acb92d" providerId="ADAL" clId="{543B53C6-AB9C-4B6F-AC93-78F0324FCE23}" dt="2026-09-16T22:27:46.710" v="1454" actId="1076"/>
+        <pc:chgData name="Sandra Elizabeth Villamarin Mendez" userId="aec40f8d-d04b-44fb-9d76-6d86c6acb92d" providerId="ADAL" clId="{543B53C6-AB9C-4B6F-AC93-78F0324FCE23}" dt="2026-09-17T16:35:34.179" v="1711"/>
         <pc:sldMkLst>
           <pc:docMk/>
           <pc:sldMk cId="0" sldId="274"/>
         </pc:sldMkLst>
         <pc:spChg chg="mod">
-          <ac:chgData name="Sandra Elizabeth Villamarin Mendez" userId="aec40f8d-d04b-44fb-9d76-6d86c6acb92d" providerId="ADAL" clId="{543B53C6-AB9C-4B6F-AC93-78F0324FCE23}" dt="2026-09-16T22:12:57.241" v="1343" actId="20577"/>
+          <ac:chgData name="Sandra Elizabeth Villamarin Mendez" userId="aec40f8d-d04b-44fb-9d76-6d86c6acb92d" providerId="ADAL" clId="{543B53C6-AB9C-4B6F-AC93-78F0324FCE23}" dt="2026-09-17T16:34:06.523" v="1709" actId="20577"/>
           <ac:spMkLst>
             <pc:docMk/>
             <pc:sldMk cId="0" sldId="274"/>
@@ -748,7 +796,7 @@
           </ac:spMkLst>
         </pc:spChg>
         <pc:spChg chg="mod">
-          <ac:chgData name="Sandra Elizabeth Villamarin Mendez" userId="aec40f8d-d04b-44fb-9d76-6d86c6acb92d" providerId="ADAL" clId="{543B53C6-AB9C-4B6F-AC93-78F0324FCE23}" dt="2026-09-16T22:18:55.649" v="1356" actId="20577"/>
+          <ac:chgData name="Sandra Elizabeth Villamarin Mendez" userId="aec40f8d-d04b-44fb-9d76-6d86c6acb92d" providerId="ADAL" clId="{543B53C6-AB9C-4B6F-AC93-78F0324FCE23}" dt="2026-09-17T16:35:34.179" v="1711"/>
           <ac:spMkLst>
             <pc:docMk/>
             <pc:sldMk cId="0" sldId="274"/>
@@ -887,12 +935,6 @@
             <c:idx val="0"/>
             <c:invertIfNegative val="0"/>
             <c:bubble3D val="0"/>
-            <c:spPr>
-              <a:solidFill>
-                <a:srgbClr val="C0392B"/>
-              </a:solidFill>
-              <a:effectLst/>
-            </c:spPr>
             <c:extLst>
               <c:ext xmlns:c16="http://schemas.microsoft.com/office/drawing/2014/chart" uri="{C3380CC4-5D6E-409C-BE32-E72D297353CC}">
                 <c16:uniqueId val="{00000001-809F-4DD2-8E18-FA52547A87F8}"/>
@@ -903,12 +945,6 @@
             <c:idx val="1"/>
             <c:invertIfNegative val="0"/>
             <c:bubble3D val="0"/>
-            <c:spPr>
-              <a:solidFill>
-                <a:srgbClr val="C0392B"/>
-              </a:solidFill>
-              <a:effectLst/>
-            </c:spPr>
             <c:extLst>
               <c:ext xmlns:c16="http://schemas.microsoft.com/office/drawing/2014/chart" uri="{C3380CC4-5D6E-409C-BE32-E72D297353CC}">
                 <c16:uniqueId val="{00000003-809F-4DD2-8E18-FA52547A87F8}"/>
@@ -919,12 +955,6 @@
             <c:idx val="2"/>
             <c:invertIfNegative val="0"/>
             <c:bubble3D val="0"/>
-            <c:spPr>
-              <a:solidFill>
-                <a:srgbClr val="C0392B"/>
-              </a:solidFill>
-              <a:effectLst/>
-            </c:spPr>
             <c:extLst>
               <c:ext xmlns:c16="http://schemas.microsoft.com/office/drawing/2014/chart" uri="{C3380CC4-5D6E-409C-BE32-E72D297353CC}">
                 <c16:uniqueId val="{00000005-809F-4DD2-8E18-FA52547A87F8}"/>
@@ -935,12 +965,6 @@
             <c:idx val="3"/>
             <c:invertIfNegative val="0"/>
             <c:bubble3D val="0"/>
-            <c:spPr>
-              <a:solidFill>
-                <a:srgbClr val="C0392B"/>
-              </a:solidFill>
-              <a:effectLst/>
-            </c:spPr>
             <c:extLst>
               <c:ext xmlns:c16="http://schemas.microsoft.com/office/drawing/2014/chart" uri="{C3380CC4-5D6E-409C-BE32-E72D297353CC}">
                 <c16:uniqueId val="{00000007-809F-4DD2-8E18-FA52547A87F8}"/>
@@ -951,12 +975,6 @@
             <c:idx val="4"/>
             <c:invertIfNegative val="0"/>
             <c:bubble3D val="0"/>
-            <c:spPr>
-              <a:solidFill>
-                <a:srgbClr val="C0392B"/>
-              </a:solidFill>
-              <a:effectLst/>
-            </c:spPr>
             <c:extLst>
               <c:ext xmlns:c16="http://schemas.microsoft.com/office/drawing/2014/chart" uri="{C3380CC4-5D6E-409C-BE32-E72D297353CC}">
                 <c16:uniqueId val="{00000009-809F-4DD2-8E18-FA52547A87F8}"/>
@@ -967,12 +985,6 @@
             <c:idx val="5"/>
             <c:invertIfNegative val="0"/>
             <c:bubble3D val="0"/>
-            <c:spPr>
-              <a:solidFill>
-                <a:srgbClr val="C0392B"/>
-              </a:solidFill>
-              <a:effectLst/>
-            </c:spPr>
             <c:extLst>
               <c:ext xmlns:c16="http://schemas.microsoft.com/office/drawing/2014/chart" uri="{C3380CC4-5D6E-409C-BE32-E72D297353CC}">
                 <c16:uniqueId val="{0000000B-809F-4DD2-8E18-FA52547A87F8}"/>
@@ -4925,29 +4937,7 @@
                 <a:ea typeface="Calibri" pitchFamily="34" charset="-122"/>
                 <a:cs typeface="Calibri" pitchFamily="34" charset="-120"/>
               </a:rPr>
-              <a:t> </a:t>
-            </a:r>
-            <a:r>
-              <a:rPr lang="en-US" sz="1300" i="1" dirty="0" err="1">
-                <a:solidFill>
-                  <a:srgbClr val="5B6584"/>
-                </a:solidFill>
-                <a:latin typeface="Calibri" pitchFamily="34" charset="0"/>
-                <a:ea typeface="Calibri" pitchFamily="34" charset="-122"/>
-                <a:cs typeface="Calibri" pitchFamily="34" charset="-120"/>
-              </a:rPr>
-              <a:t>Antrhopic</a:t>
-            </a:r>
-            <a:r>
-              <a:rPr lang="en-US" sz="1300" i="1" dirty="0">
-                <a:solidFill>
-                  <a:srgbClr val="5B6584"/>
-                </a:solidFill>
-                <a:latin typeface="Calibri" pitchFamily="34" charset="0"/>
-                <a:ea typeface="Calibri" pitchFamily="34" charset="-122"/>
-                <a:cs typeface="Calibri" pitchFamily="34" charset="-120"/>
-              </a:rPr>
-              <a:t> y Claude. </a:t>
+              <a:t> GPT y Claude. </a:t>
             </a:r>
             <a:endParaRPr lang="en-US" sz="1300" dirty="0"/>
           </a:p>
@@ -5231,7 +5221,7 @@
                 <a:ea typeface="Calibri" pitchFamily="34" charset="-122"/>
                 <a:cs typeface="Calibri" pitchFamily="34" charset="-120"/>
               </a:rPr>
-              <a:t>12.9% (Anthropic)  vs.  7.5% (</a:t>
+              <a:t>12.9% (GPT-5)  vs.  7.5% (Claude- </a:t>
             </a:r>
             <a:r>
               <a:rPr lang="en-US" sz="1150" b="1" dirty="0" err="1">
@@ -5242,7 +5232,7 @@
                 <a:ea typeface="Calibri" pitchFamily="34" charset="-122"/>
                 <a:cs typeface="Calibri" pitchFamily="34" charset="-120"/>
               </a:rPr>
-              <a:t>claude</a:t>
+              <a:t>Sonet</a:t>
             </a:r>
             <a:r>
               <a:rPr lang="en-US" sz="1150" b="1" dirty="0">
@@ -5253,7 +5243,7 @@
                 <a:ea typeface="Calibri" pitchFamily="34" charset="-122"/>
                 <a:cs typeface="Calibri" pitchFamily="34" charset="-120"/>
               </a:rPr>
-              <a:t>)
+              <a:t> 5)
 </a:t>
             </a:r>
             <a:r>
@@ -5309,7 +5299,7 @@
                 <a:ea typeface="Calibri" pitchFamily="34" charset="-122"/>
                 <a:cs typeface="Calibri" pitchFamily="34" charset="-120"/>
               </a:rPr>
-              <a:t> (Anthropic)</a:t>
+              <a:t> (GPT-5)</a:t>
             </a:r>
             <a:r>
               <a:rPr lang="en-US" sz="1150" dirty="0">
@@ -12478,7 +12468,117 @@
                 <a:ea typeface="Calibri" pitchFamily="34" charset="-122"/>
                 <a:cs typeface="Calibri" pitchFamily="34" charset="-120"/>
               </a:rPr>
-              <a:t>Comercial define el volumen objetivo; Finanzas valida el costo y el techo de comisión; Riesgo/Calidad define el umbral de “mala venta”; RRHH valida equidad entre centros de costo antes de publicar el esquema.</a:t>
+              <a:t>Comercial define el volumen objetivo; Finanzas valida el costo y el techo de comisión; Riesgo/Calidad define el umbral de “mala venta”; RRHH valida equidad entre centros de costo antes de publicar el </a:t>
+            </a:r>
+            <a:r>
+              <a:rPr lang="en-US" sz="1400" dirty="0" err="1">
+                <a:solidFill>
+                  <a:srgbClr val="5B6584"/>
+                </a:solidFill>
+                <a:latin typeface="Calibri" pitchFamily="34" charset="0"/>
+                <a:ea typeface="Calibri" pitchFamily="34" charset="-122"/>
+                <a:cs typeface="Calibri" pitchFamily="34" charset="-120"/>
+              </a:rPr>
+              <a:t>esquema</a:t>
+            </a:r>
+            <a:r>
+              <a:rPr lang="en-US" sz="1400" dirty="0">
+                <a:solidFill>
+                  <a:srgbClr val="5B6584"/>
+                </a:solidFill>
+                <a:latin typeface="Calibri" pitchFamily="34" charset="0"/>
+                <a:ea typeface="Calibri" pitchFamily="34" charset="-122"/>
+                <a:cs typeface="Calibri" pitchFamily="34" charset="-120"/>
+              </a:rPr>
+              <a:t> (</a:t>
+            </a:r>
+            <a:r>
+              <a:rPr lang="en-US" sz="1400" dirty="0" err="1">
+                <a:solidFill>
+                  <a:srgbClr val="5B6584"/>
+                </a:solidFill>
+                <a:latin typeface="Calibri" pitchFamily="34" charset="0"/>
+                <a:ea typeface="Calibri" pitchFamily="34" charset="-122"/>
+                <a:cs typeface="Calibri" pitchFamily="34" charset="-120"/>
+              </a:rPr>
+              <a:t>equitativo</a:t>
+            </a:r>
+            <a:r>
+              <a:rPr lang="en-US" sz="1400" dirty="0">
+                <a:solidFill>
+                  <a:srgbClr val="5B6584"/>
+                </a:solidFill>
+                <a:latin typeface="Calibri" pitchFamily="34" charset="0"/>
+                <a:ea typeface="Calibri" pitchFamily="34" charset="-122"/>
+                <a:cs typeface="Calibri" pitchFamily="34" charset="-120"/>
+              </a:rPr>
+              <a:t> para </a:t>
+            </a:r>
+            <a:r>
+              <a:rPr lang="en-US" sz="1400" dirty="0" err="1">
+                <a:solidFill>
+                  <a:srgbClr val="5B6584"/>
+                </a:solidFill>
+                <a:latin typeface="Calibri" pitchFamily="34" charset="0"/>
+                <a:ea typeface="Calibri" pitchFamily="34" charset="-122"/>
+                <a:cs typeface="Calibri" pitchFamily="34" charset="-120"/>
+              </a:rPr>
+              <a:t>todos</a:t>
+            </a:r>
+            <a:r>
+              <a:rPr lang="en-US" sz="1400" dirty="0">
+                <a:solidFill>
+                  <a:srgbClr val="5B6584"/>
+                </a:solidFill>
+                <a:latin typeface="Calibri" pitchFamily="34" charset="0"/>
+                <a:ea typeface="Calibri" pitchFamily="34" charset="-122"/>
+                <a:cs typeface="Calibri" pitchFamily="34" charset="-120"/>
+              </a:rPr>
+              <a:t> </a:t>
+            </a:r>
+            <a:r>
+              <a:rPr lang="en-US" sz="1400" dirty="0" err="1">
+                <a:solidFill>
+                  <a:srgbClr val="5B6584"/>
+                </a:solidFill>
+                <a:latin typeface="Calibri" pitchFamily="34" charset="0"/>
+                <a:ea typeface="Calibri" pitchFamily="34" charset="-122"/>
+                <a:cs typeface="Calibri" pitchFamily="34" charset="-120"/>
+              </a:rPr>
+              <a:t>los</a:t>
+            </a:r>
+            <a:r>
+              <a:rPr lang="en-US" sz="1400" dirty="0">
+                <a:solidFill>
+                  <a:srgbClr val="5B6584"/>
+                </a:solidFill>
+                <a:latin typeface="Calibri" pitchFamily="34" charset="0"/>
+                <a:ea typeface="Calibri" pitchFamily="34" charset="-122"/>
+                <a:cs typeface="Calibri" pitchFamily="34" charset="-120"/>
+              </a:rPr>
+              <a:t> </a:t>
+            </a:r>
+            <a:r>
+              <a:rPr lang="en-US" sz="1400" dirty="0" err="1">
+                <a:solidFill>
+                  <a:srgbClr val="5B6584"/>
+                </a:solidFill>
+                <a:latin typeface="Calibri" pitchFamily="34" charset="0"/>
+                <a:ea typeface="Calibri" pitchFamily="34" charset="-122"/>
+                <a:cs typeface="Calibri" pitchFamily="34" charset="-120"/>
+              </a:rPr>
+              <a:t>vendedores</a:t>
+            </a:r>
+            <a:r>
+              <a:rPr lang="en-US" sz="1400" dirty="0">
+                <a:solidFill>
+                  <a:srgbClr val="5B6584"/>
+                </a:solidFill>
+                <a:latin typeface="Calibri" pitchFamily="34" charset="0"/>
+                <a:ea typeface="Calibri" pitchFamily="34" charset="-122"/>
+                <a:cs typeface="Calibri" pitchFamily="34" charset="-120"/>
+              </a:rPr>
+              <a:t>).</a:t>
             </a:r>
             <a:endParaRPr lang="en-US" sz="1400" dirty="0"/>
           </a:p>
@@ -12733,7 +12833,7 @@
                 <a:ea typeface="Calibri" pitchFamily="34" charset="-122"/>
                 <a:cs typeface="Calibri" pitchFamily="34" charset="-120"/>
               </a:rPr>
-              <a:t>1</a:t>
+              <a:t>4</a:t>
             </a:r>
             <a:endParaRPr lang="en-US" sz="1400" dirty="0"/>
           </a:p>
@@ -12799,9 +12899,6 @@
           <a:bodyPr wrap="square" rtlCol="0" anchor="ctr"/>
           <a:lstStyle/>
           <a:p>
-            <a:pPr marL="0" indent="0">
-              <a:buNone/>
-            </a:pPr>
             <a:r>
               <a:rPr lang="en-US" sz="1400" dirty="0">
                 <a:solidFill>
@@ -12811,9 +12908,291 @@
                 <a:ea typeface="Calibri" pitchFamily="34" charset="-122"/>
                 <a:cs typeface="Calibri" pitchFamily="34" charset="-120"/>
               </a:rPr>
-              <a:t>Cruzaría la fecha de salida contra cambios de parámetros de comisión y cumplimiento previo — pero hoy es solo una hipótesis: 99.6% de los registros no tiene fecha de salida del vendedor. Antes de afirmar causalidad, se necesita ese dato y, después, un método causal (diferencias-en-diferencias o supervivencia) para descartar que sea coincidencia temporal.</a:t>
-            </a:r>
-            <a:endParaRPr lang="en-US" sz="1400" dirty="0"/>
+              <a:t>Cruzaría la fecha de salida (</a:t>
+            </a:r>
+            <a:r>
+              <a:rPr lang="en-US" sz="1400" dirty="0" err="1">
+                <a:solidFill>
+                  <a:srgbClr val="5B6584"/>
+                </a:solidFill>
+                <a:latin typeface="Calibri" pitchFamily="34" charset="0"/>
+                <a:ea typeface="Calibri" pitchFamily="34" charset="-122"/>
+                <a:cs typeface="Calibri" pitchFamily="34" charset="-120"/>
+              </a:rPr>
+              <a:t>dato</a:t>
+            </a:r>
+            <a:r>
+              <a:rPr lang="en-US" sz="1400" dirty="0">
+                <a:solidFill>
+                  <a:srgbClr val="5B6584"/>
+                </a:solidFill>
+                <a:latin typeface="Calibri" pitchFamily="34" charset="0"/>
+                <a:ea typeface="Calibri" pitchFamily="34" charset="-122"/>
+                <a:cs typeface="Calibri" pitchFamily="34" charset="-120"/>
+              </a:rPr>
+              <a:t> </a:t>
+            </a:r>
+            <a:r>
+              <a:rPr lang="en-US" sz="1400" dirty="0" err="1">
+                <a:solidFill>
+                  <a:srgbClr val="5B6584"/>
+                </a:solidFill>
+                <a:latin typeface="Calibri" pitchFamily="34" charset="0"/>
+                <a:ea typeface="Calibri" pitchFamily="34" charset="-122"/>
+                <a:cs typeface="Calibri" pitchFamily="34" charset="-120"/>
+              </a:rPr>
+              <a:t>que</a:t>
+            </a:r>
+            <a:r>
+              <a:rPr lang="en-US" sz="1400" dirty="0">
+                <a:solidFill>
+                  <a:srgbClr val="5B6584"/>
+                </a:solidFill>
+                <a:latin typeface="Calibri" pitchFamily="34" charset="0"/>
+                <a:ea typeface="Calibri" pitchFamily="34" charset="-122"/>
+                <a:cs typeface="Calibri" pitchFamily="34" charset="-120"/>
+              </a:rPr>
+              <a:t> al </a:t>
+            </a:r>
+            <a:r>
+              <a:rPr lang="en-US" sz="1400" dirty="0" err="1">
+                <a:solidFill>
+                  <a:srgbClr val="5B6584"/>
+                </a:solidFill>
+                <a:latin typeface="Calibri" pitchFamily="34" charset="0"/>
+                <a:ea typeface="Calibri" pitchFamily="34" charset="-122"/>
+                <a:cs typeface="Calibri" pitchFamily="34" charset="-120"/>
+              </a:rPr>
+              <a:t>momento</a:t>
+            </a:r>
+            <a:r>
+              <a:rPr lang="en-US" sz="1400" dirty="0">
+                <a:solidFill>
+                  <a:srgbClr val="5B6584"/>
+                </a:solidFill>
+                <a:latin typeface="Calibri" pitchFamily="34" charset="0"/>
+                <a:ea typeface="Calibri" pitchFamily="34" charset="-122"/>
+                <a:cs typeface="Calibri" pitchFamily="34" charset="-120"/>
+              </a:rPr>
+              <a:t> no </a:t>
+            </a:r>
+            <a:r>
+              <a:rPr lang="en-US" sz="1400" dirty="0" err="1">
+                <a:solidFill>
+                  <a:srgbClr val="5B6584"/>
+                </a:solidFill>
+                <a:latin typeface="Calibri" pitchFamily="34" charset="0"/>
+                <a:ea typeface="Calibri" pitchFamily="34" charset="-122"/>
+                <a:cs typeface="Calibri" pitchFamily="34" charset="-120"/>
+              </a:rPr>
+              <a:t>dispongo</a:t>
+            </a:r>
+            <a:r>
+              <a:rPr lang="en-US" sz="1400" dirty="0">
+                <a:solidFill>
+                  <a:srgbClr val="5B6584"/>
+                </a:solidFill>
+                <a:latin typeface="Calibri" pitchFamily="34" charset="0"/>
+                <a:ea typeface="Calibri" pitchFamily="34" charset="-122"/>
+                <a:cs typeface="Calibri" pitchFamily="34" charset="-120"/>
+              </a:rPr>
+              <a:t>)  contra cambios de parámetros de comisión y </a:t>
+            </a:r>
+            <a:r>
+              <a:rPr lang="en-US" sz="1400" dirty="0" err="1">
+                <a:solidFill>
+                  <a:srgbClr val="5B6584"/>
+                </a:solidFill>
+                <a:latin typeface="Calibri" pitchFamily="34" charset="0"/>
+                <a:ea typeface="Calibri" pitchFamily="34" charset="-122"/>
+                <a:cs typeface="Calibri" pitchFamily="34" charset="-120"/>
+              </a:rPr>
+              <a:t>cumplimiento</a:t>
+            </a:r>
+            <a:r>
+              <a:rPr lang="en-US" sz="1400" dirty="0">
+                <a:solidFill>
+                  <a:srgbClr val="5B6584"/>
+                </a:solidFill>
+                <a:latin typeface="Calibri" pitchFamily="34" charset="0"/>
+                <a:ea typeface="Calibri" pitchFamily="34" charset="-122"/>
+                <a:cs typeface="Calibri" pitchFamily="34" charset="-120"/>
+              </a:rPr>
+              <a:t> </a:t>
+            </a:r>
+            <a:r>
+              <a:rPr lang="en-US" sz="1400" dirty="0" err="1">
+                <a:solidFill>
+                  <a:srgbClr val="5B6584"/>
+                </a:solidFill>
+                <a:latin typeface="Calibri" pitchFamily="34" charset="0"/>
+                <a:ea typeface="Calibri" pitchFamily="34" charset="-122"/>
+                <a:cs typeface="Calibri" pitchFamily="34" charset="-120"/>
+              </a:rPr>
+              <a:t>previo</a:t>
+            </a:r>
+            <a:r>
+              <a:rPr lang="en-US" sz="1400" dirty="0">
+                <a:solidFill>
+                  <a:srgbClr val="5B6584"/>
+                </a:solidFill>
+                <a:latin typeface="Calibri" pitchFamily="34" charset="0"/>
+                <a:ea typeface="Calibri" pitchFamily="34" charset="-122"/>
+                <a:cs typeface="Calibri" pitchFamily="34" charset="-120"/>
+              </a:rPr>
+              <a:t> —. Antes de afirmar causalidad, se necesita ese dato y, </a:t>
+            </a:r>
+            <a:r>
+              <a:rPr lang="en-US" sz="1400" dirty="0" err="1">
+                <a:solidFill>
+                  <a:srgbClr val="5B6584"/>
+                </a:solidFill>
+                <a:latin typeface="Calibri" pitchFamily="34" charset="0"/>
+                <a:ea typeface="Calibri" pitchFamily="34" charset="-122"/>
+                <a:cs typeface="Calibri" pitchFamily="34" charset="-120"/>
+              </a:rPr>
+              <a:t>después</a:t>
+            </a:r>
+            <a:r>
+              <a:rPr lang="en-US" sz="1400" dirty="0">
+                <a:solidFill>
+                  <a:srgbClr val="5B6584"/>
+                </a:solidFill>
+                <a:latin typeface="Calibri" pitchFamily="34" charset="0"/>
+                <a:ea typeface="Calibri" pitchFamily="34" charset="-122"/>
+                <a:cs typeface="Calibri" pitchFamily="34" charset="-120"/>
+              </a:rPr>
+              <a:t>, hay </a:t>
+            </a:r>
+            <a:r>
+              <a:rPr lang="en-US" sz="1400" dirty="0" err="1">
+                <a:solidFill>
+                  <a:srgbClr val="5B6584"/>
+                </a:solidFill>
+                <a:latin typeface="Calibri" pitchFamily="34" charset="0"/>
+                <a:ea typeface="Calibri" pitchFamily="34" charset="-122"/>
+                <a:cs typeface="Calibri" pitchFamily="34" charset="-120"/>
+              </a:rPr>
+              <a:t>que</a:t>
+            </a:r>
+            <a:r>
+              <a:rPr lang="en-US" sz="1400" dirty="0">
+                <a:solidFill>
+                  <a:srgbClr val="5B6584"/>
+                </a:solidFill>
+                <a:latin typeface="Calibri" pitchFamily="34" charset="0"/>
+                <a:ea typeface="Calibri" pitchFamily="34" charset="-122"/>
+                <a:cs typeface="Calibri" pitchFamily="34" charset="-120"/>
+              </a:rPr>
+              <a:t> </a:t>
+            </a:r>
+            <a:r>
+              <a:rPr lang="en-US" sz="1400" dirty="0" err="1">
+                <a:solidFill>
+                  <a:srgbClr val="5B6584"/>
+                </a:solidFill>
+                <a:latin typeface="Calibri" pitchFamily="34" charset="0"/>
+                <a:ea typeface="Calibri" pitchFamily="34" charset="-122"/>
+                <a:cs typeface="Calibri" pitchFamily="34" charset="-120"/>
+              </a:rPr>
+              <a:t>tener</a:t>
+            </a:r>
+            <a:r>
+              <a:rPr lang="en-US" sz="1400" dirty="0">
+                <a:solidFill>
+                  <a:srgbClr val="5B6584"/>
+                </a:solidFill>
+                <a:latin typeface="Calibri" pitchFamily="34" charset="0"/>
+                <a:ea typeface="Calibri" pitchFamily="34" charset="-122"/>
+                <a:cs typeface="Calibri" pitchFamily="34" charset="-120"/>
+              </a:rPr>
+              <a:t> claro </a:t>
+            </a:r>
+            <a:r>
+              <a:rPr lang="en-US" sz="1400" dirty="0" err="1">
+                <a:solidFill>
+                  <a:srgbClr val="5B6584"/>
+                </a:solidFill>
+                <a:latin typeface="Calibri" pitchFamily="34" charset="0"/>
+                <a:ea typeface="Calibri" pitchFamily="34" charset="-122"/>
+                <a:cs typeface="Calibri" pitchFamily="34" charset="-120"/>
+              </a:rPr>
+              <a:t>que</a:t>
+            </a:r>
+            <a:r>
+              <a:rPr lang="en-US" sz="1400" dirty="0">
+                <a:solidFill>
+                  <a:srgbClr val="5B6584"/>
+                </a:solidFill>
+                <a:latin typeface="Calibri" pitchFamily="34" charset="0"/>
+                <a:ea typeface="Calibri" pitchFamily="34" charset="-122"/>
+                <a:cs typeface="Calibri" pitchFamily="34" charset="-120"/>
+              </a:rPr>
+              <a:t> e</a:t>
+            </a:r>
+            <a:r>
+              <a:rPr lang="es-EC" sz="1400" dirty="0">
+                <a:solidFill>
+                  <a:srgbClr val="5B6584"/>
+                </a:solidFill>
+                <a:latin typeface="Calibri" pitchFamily="34" charset="0"/>
+                <a:ea typeface="Calibri" pitchFamily="34" charset="-122"/>
+                <a:cs typeface="Calibri" pitchFamily="34" charset="-120"/>
+              </a:rPr>
+              <a:t>n vez de solo contar "cuántos se fueron", medir cuánto tiempo permaneció cada persona antes de irse — y ver si ese tiempo se acorta después de algo (como un cambio de comisión).</a:t>
+            </a:r>
+            <a:r>
+              <a:rPr lang="en-US" sz="1400" dirty="0">
+                <a:solidFill>
+                  <a:srgbClr val="5B6584"/>
+                </a:solidFill>
+                <a:latin typeface="Calibri" pitchFamily="34" charset="0"/>
+                <a:ea typeface="Calibri" pitchFamily="34" charset="-122"/>
+                <a:cs typeface="Calibri" pitchFamily="34" charset="-120"/>
+              </a:rPr>
+              <a:t> para descartar que sea </a:t>
+            </a:r>
+            <a:r>
+              <a:rPr lang="en-US" sz="1400" dirty="0" err="1">
+                <a:solidFill>
+                  <a:srgbClr val="5B6584"/>
+                </a:solidFill>
+                <a:latin typeface="Calibri" pitchFamily="34" charset="0"/>
+                <a:ea typeface="Calibri" pitchFamily="34" charset="-122"/>
+                <a:cs typeface="Calibri" pitchFamily="34" charset="-120"/>
+              </a:rPr>
+              <a:t>coincidencia</a:t>
+            </a:r>
+            <a:r>
+              <a:rPr lang="en-US" sz="1400" dirty="0">
+                <a:solidFill>
+                  <a:srgbClr val="5B6584"/>
+                </a:solidFill>
+                <a:latin typeface="Calibri" pitchFamily="34" charset="0"/>
+                <a:ea typeface="Calibri" pitchFamily="34" charset="-122"/>
+                <a:cs typeface="Calibri" pitchFamily="34" charset="-120"/>
+              </a:rPr>
+              <a:t> temporal. (</a:t>
+            </a:r>
+            <a:r>
+              <a:rPr lang="es-EC" sz="1400" dirty="0">
+                <a:solidFill>
+                  <a:srgbClr val="5B6584"/>
+                </a:solidFill>
+                <a:latin typeface="Calibri" pitchFamily="34" charset="0"/>
+                <a:ea typeface="Calibri" pitchFamily="34" charset="-122"/>
+                <a:cs typeface="Calibri" pitchFamily="34" charset="-120"/>
+              </a:rPr>
+              <a:t>igual de bien a estacionalidad, competencia laboral, o clima organizacional)</a:t>
+            </a:r>
+            <a:endParaRPr lang="en-US" sz="1400" dirty="0">
+              <a:solidFill>
+                <a:srgbClr val="5B6584"/>
+              </a:solidFill>
+              <a:latin typeface="Calibri" pitchFamily="34" charset="0"/>
+              <a:ea typeface="Calibri" pitchFamily="34" charset="-122"/>
+              <a:cs typeface="Calibri" pitchFamily="34" charset="-120"/>
+            </a:endParaRPr>
           </a:p>
         </p:txBody>
       </p:sp>
@@ -12826,7 +13205,7 @@
         <p:spPr>
           <a:xfrm>
             <a:off x="548640" y="3474720"/>
-            <a:ext cx="11064240" cy="1737360"/>
+            <a:ext cx="11064240" cy="2611120"/>
           </a:xfrm>
           <a:prstGeom prst="roundRect">
             <a:avLst>
@@ -12916,7 +13295,7 @@
                 <a:ea typeface="Calibri" pitchFamily="34" charset="-122"/>
                 <a:cs typeface="Calibri" pitchFamily="34" charset="-120"/>
               </a:rPr>
-              <a:t>2</a:t>
+              <a:t>5</a:t>
             </a:r>
             <a:endParaRPr lang="en-US" sz="1400" dirty="0"/>
           </a:p>
@@ -12970,22 +13349,43 @@
         <p:spPr>
           <a:xfrm>
             <a:off x="1417320" y="4206240"/>
-            <a:ext cx="10058400" cy="914400"/>
-          </a:xfrm>
-          <a:prstGeom prst="rect">
-            <a:avLst/>
-          </a:prstGeom>
-          <a:noFill/>
-          <a:ln/>
-        </p:spPr>
-        <p:txBody>
-          <a:bodyPr wrap="square" rtlCol="0" anchor="ctr"/>
-          <a:lstStyle/>
-          <a:p>
-            <a:pPr marL="0" indent="0">
-              <a:buNone/>
-            </a:pPr>
-            <a:r>
+            <a:ext cx="10058400" cy="1584960"/>
+          </a:xfrm>
+          <a:prstGeom prst="rect">
+            <a:avLst/>
+          </a:prstGeom>
+          <a:noFill/>
+          <a:ln/>
+        </p:spPr>
+        <p:txBody>
+          <a:bodyPr wrap="square" rtlCol="0" anchor="ctr"/>
+          <a:lstStyle/>
+          <a:p>
+            <a:r>
+              <a:rPr lang="es-EC" sz="1400" i="1" dirty="0"/>
+              <a:t>“</a:t>
+            </a:r>
+            <a:r>
+              <a:rPr lang="es-MX" sz="1400" i="1" dirty="0"/>
+              <a:t>No basta con mirar un solo número. Mido el resultado con la comisión final (que ya premia la calidad y castiga la mala venta), pero además vigilo por separado la tasa de mala venta y el </a:t>
+            </a:r>
+            <a:r>
+              <a:rPr lang="es-MX" sz="1400" i="1" dirty="0" err="1"/>
+              <a:t>early</a:t>
+            </a:r>
+            <a:r>
+              <a:rPr lang="es-MX" sz="1400" i="1" dirty="0"/>
+              <a:t> </a:t>
+            </a:r>
+            <a:r>
+              <a:rPr lang="es-MX" sz="1400" i="1" dirty="0" err="1"/>
+              <a:t>churn</a:t>
+            </a:r>
+            <a:r>
+              <a:rPr lang="es-MX" sz="1400" i="1" dirty="0"/>
+              <a:t> — porque si esas dos empiezan a subir, es la señal de que alguien está 'jugando' con el sistema para verse bien en el número principal."</a:t>
+            </a:r>
+            <a:br>
               <a:rPr lang="en-US" sz="1400" dirty="0">
                 <a:solidFill>
                   <a:srgbClr val="5B6584"/>
@@ -12994,7 +13394,38 @@
                 <a:ea typeface="Calibri" pitchFamily="34" charset="-122"/>
                 <a:cs typeface="Calibri" pitchFamily="34" charset="-120"/>
               </a:rPr>
-              <a:t>Primario: % Cumplimiento de Meta ponderado por calidad (no cumplimiento bruto). Control: Tasa de Mala Venta y Tasa de Early Churn — evitan que el primario se optimice sacrificando calidad.</a:t>
+            </a:br>
+            <a:br>
+              <a:rPr lang="en-US" sz="1400" dirty="0">
+                <a:solidFill>
+                  <a:srgbClr val="5B6584"/>
+                </a:solidFill>
+                <a:latin typeface="Calibri" pitchFamily="34" charset="0"/>
+                <a:ea typeface="Calibri" pitchFamily="34" charset="-122"/>
+                <a:cs typeface="Calibri" pitchFamily="34" charset="-120"/>
+              </a:rPr>
+            </a:br>
+            <a:r>
+              <a:rPr lang="en-US" sz="1400" dirty="0" err="1">
+                <a:solidFill>
+                  <a:srgbClr val="5B6584"/>
+                </a:solidFill>
+                <a:latin typeface="Calibri" pitchFamily="34" charset="0"/>
+                <a:ea typeface="Calibri" pitchFamily="34" charset="-122"/>
+                <a:cs typeface="Calibri" pitchFamily="34" charset="-120"/>
+              </a:rPr>
+              <a:t>Primario</a:t>
+            </a:r>
+            <a:r>
+              <a:rPr lang="en-US" sz="1400" dirty="0">
+                <a:solidFill>
+                  <a:srgbClr val="5B6584"/>
+                </a:solidFill>
+                <a:latin typeface="Calibri" pitchFamily="34" charset="0"/>
+                <a:ea typeface="Calibri" pitchFamily="34" charset="-122"/>
+                <a:cs typeface="Calibri" pitchFamily="34" charset="-120"/>
+              </a:rPr>
+              <a:t>: % Cumplimiento de Meta ponderado por calidad (no cumplimiento bruto). Control: Tasa de Mala Venta y Tasa de Early Churn — evitan que el primario se optimice sacrificando calidad.</a:t>
             </a:r>
             <a:endParaRPr lang="en-US" sz="1400" dirty="0"/>
           </a:p>
@@ -13251,17 +13682,6 @@
               <a:buNone/>
             </a:pPr>
             <a:r>
-              <a:rPr lang="en-US" sz="1300" b="1" dirty="0">
-                <a:solidFill>
-                  <a:srgbClr val="CADCFC"/>
-                </a:solidFill>
-                <a:latin typeface="Calibri" pitchFamily="34" charset="0"/>
-                <a:ea typeface="Calibri" pitchFamily="34" charset="-122"/>
-                <a:cs typeface="Calibri" pitchFamily="34" charset="-120"/>
-              </a:rPr>
-              <a:t>En una frase:  </a:t>
-            </a:r>
-            <a:r>
               <a:rPr lang="en-US" sz="1300" dirty="0">
                 <a:solidFill>
                   <a:srgbClr val="FFFFFF"/>
@@ -13336,7 +13756,7 @@
                 <a:ea typeface="Calibri" pitchFamily="34" charset="-122"/>
                 <a:cs typeface="Calibri" pitchFamily="34" charset="-120"/>
               </a:rPr>
-              <a:t> (Anthropic ) y se </a:t>
+              <a:t> (GPT -5) y se </a:t>
             </a:r>
             <a:r>
               <a:rPr lang="en-US" sz="1300" dirty="0" err="1">
@@ -13595,9 +14015,6 @@
           <a:bodyPr wrap="square" rtlCol="0" anchor="ctr"/>
           <a:lstStyle/>
           <a:p>
-            <a:pPr marL="0" indent="0">
-              <a:buNone/>
-            </a:pPr>
             <a:r>
               <a:rPr lang="en-US" sz="1000" dirty="0">
                 <a:solidFill>
@@ -13607,7 +14024,29 @@
                 <a:ea typeface="Calibri" pitchFamily="34" charset="-122"/>
                 <a:cs typeface="Calibri" pitchFamily="34" charset="-120"/>
               </a:rPr>
-              <a:t>% Cumplimiento de MRC - </a:t>
+              <a:t>% Cumplimiento de MRC </a:t>
+            </a:r>
+            <a:r>
+              <a:rPr lang="en-US" sz="1000" dirty="0" err="1">
+                <a:solidFill>
+                  <a:srgbClr val="5B6584"/>
+                </a:solidFill>
+                <a:latin typeface="Calibri" pitchFamily="34" charset="0"/>
+                <a:ea typeface="Calibri" pitchFamily="34" charset="-122"/>
+                <a:cs typeface="Calibri" pitchFamily="34" charset="-120"/>
+              </a:rPr>
+              <a:t>Montly</a:t>
+            </a:r>
+            <a:r>
+              <a:rPr lang="en-US" sz="1000" dirty="0">
+                <a:solidFill>
+                  <a:srgbClr val="5B6584"/>
+                </a:solidFill>
+                <a:latin typeface="Calibri" pitchFamily="34" charset="0"/>
+                <a:ea typeface="Calibri" pitchFamily="34" charset="-122"/>
+                <a:cs typeface="Calibri" pitchFamily="34" charset="-120"/>
+              </a:rPr>
+              <a:t> Recurring Charge - </a:t>
             </a:r>
             <a:r>
               <a:rPr lang="en-US" sz="1000" dirty="0" err="1">
@@ -16151,7 +16590,73 @@
                 <a:ea typeface="Calibri" pitchFamily="34" charset="-122"/>
                 <a:cs typeface="Calibri" pitchFamily="34" charset="-120"/>
               </a:rPr>
-              <a:t>Filas en la hoja Excel del archive / Filas </a:t>
+              <a:t>Filas en la hoja Excel del </a:t>
+            </a:r>
+            <a:r>
+              <a:rPr lang="en-US" sz="1000" dirty="0" err="1">
+                <a:solidFill>
+                  <a:srgbClr val="5B6584"/>
+                </a:solidFill>
+                <a:latin typeface="Calibri" pitchFamily="34" charset="0"/>
+                <a:ea typeface="Calibri" pitchFamily="34" charset="-122"/>
+                <a:cs typeface="Calibri" pitchFamily="34" charset="-120"/>
+              </a:rPr>
+              <a:t>archivo</a:t>
+            </a:r>
+            <a:r>
+              <a:rPr lang="en-US" sz="1000" dirty="0">
+                <a:solidFill>
+                  <a:srgbClr val="5B6584"/>
+                </a:solidFill>
+                <a:latin typeface="Calibri" pitchFamily="34" charset="0"/>
+                <a:ea typeface="Calibri" pitchFamily="34" charset="-122"/>
+                <a:cs typeface="Calibri" pitchFamily="34" charset="-120"/>
+              </a:rPr>
+              <a:t> / </a:t>
+            </a:r>
+            <a:r>
+              <a:rPr lang="en-US" sz="1000" dirty="0" err="1">
+                <a:solidFill>
+                  <a:srgbClr val="5B6584"/>
+                </a:solidFill>
+                <a:latin typeface="Calibri" pitchFamily="34" charset="0"/>
+                <a:ea typeface="Calibri" pitchFamily="34" charset="-122"/>
+                <a:cs typeface="Calibri" pitchFamily="34" charset="-120"/>
+              </a:rPr>
+              <a:t>Existen</a:t>
+            </a:r>
+            <a:r>
+              <a:rPr lang="en-US" sz="1000" dirty="0">
+                <a:solidFill>
+                  <a:srgbClr val="5B6584"/>
+                </a:solidFill>
+                <a:latin typeface="Calibri" pitchFamily="34" charset="0"/>
+                <a:ea typeface="Calibri" pitchFamily="34" charset="-122"/>
+                <a:cs typeface="Calibri" pitchFamily="34" charset="-120"/>
+              </a:rPr>
+              <a:t> </a:t>
+            </a:r>
+            <a:r>
+              <a:rPr lang="en-US" sz="1000" dirty="0" err="1">
+                <a:solidFill>
+                  <a:srgbClr val="5B6584"/>
+                </a:solidFill>
+                <a:latin typeface="Calibri" pitchFamily="34" charset="0"/>
+                <a:ea typeface="Calibri" pitchFamily="34" charset="-122"/>
+                <a:cs typeface="Calibri" pitchFamily="34" charset="-120"/>
+              </a:rPr>
+              <a:t>filas</a:t>
+            </a:r>
+            <a:r>
+              <a:rPr lang="en-US" sz="1000" dirty="0">
+                <a:solidFill>
+                  <a:srgbClr val="5B6584"/>
+                </a:solidFill>
+                <a:latin typeface="Calibri" pitchFamily="34" charset="0"/>
+                <a:ea typeface="Calibri" pitchFamily="34" charset="-122"/>
+                <a:cs typeface="Calibri" pitchFamily="34" charset="-120"/>
+              </a:rPr>
+              <a:t> </a:t>
             </a:r>
             <a:r>
               <a:rPr lang="en-US" sz="1000" dirty="0" err="1">
@@ -18590,7 +19095,7 @@
         </p:nvSpPr>
         <p:spPr>
           <a:xfrm>
-            <a:off x="8284464" y="4379976"/>
+            <a:off x="8284464" y="4307332"/>
             <a:ext cx="3154680" cy="548640"/>
           </a:xfrm>
           <a:prstGeom prst="rect">
@@ -18604,10 +19109,39 @@
           <a:lstStyle/>
           <a:p>
             <a:r>
+              <a:rPr lang="es-EC" sz="1200" b="1" dirty="0">
+                <a:solidFill>
+                  <a:srgbClr val="1E2761"/>
+                </a:solidFill>
+                <a:latin typeface="Calibri" pitchFamily="34" charset="0"/>
+                <a:ea typeface="Calibri" pitchFamily="34" charset="-122"/>
+                <a:cs typeface="Calibri" pitchFamily="34" charset="-120"/>
+              </a:rPr>
+              <a:t>59.7% de divergencia</a:t>
+            </a:r>
+            <a:r>
               <a:rPr lang="es-EC" sz="1200" b="1" dirty="0"/>
-              <a:t>59.7% de divergencia: ciudad del vendedor ≠ geografía del cliente</a:t>
-            </a:r>
-            <a:endParaRPr lang="en-US" sz="1200" b="1" dirty="0"/>
+              <a:t>: </a:t>
+            </a:r>
+            <a:r>
+              <a:rPr lang="es-EC" sz="1200" b="1" dirty="0">
+                <a:solidFill>
+                  <a:srgbClr val="1E2761"/>
+                </a:solidFill>
+                <a:latin typeface="Calibri" pitchFamily="34" charset="0"/>
+                <a:ea typeface="Calibri" pitchFamily="34" charset="-122"/>
+                <a:cs typeface="Calibri" pitchFamily="34" charset="-120"/>
+              </a:rPr>
+              <a:t>ciudad del vendedor ≠ geografía del cliente</a:t>
+            </a:r>
+            <a:endParaRPr lang="en-US" sz="1200" b="1" dirty="0">
+              <a:solidFill>
+                <a:srgbClr val="1E2761"/>
+              </a:solidFill>
+              <a:latin typeface="Calibri" pitchFamily="34" charset="0"/>
+              <a:ea typeface="Calibri" pitchFamily="34" charset="-122"/>
+              <a:cs typeface="Calibri" pitchFamily="34" charset="-120"/>
+            </a:endParaRPr>
           </a:p>
         </p:txBody>
       </p:sp>
@@ -22622,113 +23156,6 @@
       </p:sp>
       <p:sp>
         <p:nvSpPr>
-          <p:cNvPr id="43" name="Shape 41"/>
-          <p:cNvSpPr/>
-          <p:nvPr/>
-        </p:nvSpPr>
-        <p:spPr>
-          <a:xfrm>
-            <a:off x="548640" y="5623560"/>
-            <a:ext cx="11064240" cy="685800"/>
-          </a:xfrm>
-          <a:prstGeom prst="roundRect">
-            <a:avLst>
-              <a:gd name="adj" fmla="val 8000"/>
-            </a:avLst>
-          </a:prstGeom>
-          <a:solidFill>
-            <a:srgbClr val="EAF1F8"/>
-          </a:solidFill>
-          <a:ln w="12700">
-            <a:solidFill>
-              <a:srgbClr val="EAF1F8"/>
-            </a:solidFill>
-            <a:prstDash val="solid"/>
-          </a:ln>
-        </p:spPr>
-        <p:txBody>
-          <a:bodyPr/>
-          <a:lstStyle/>
-          <a:p>
-            <a:endParaRPr lang="es-EC"/>
-          </a:p>
-        </p:txBody>
-      </p:sp>
-      <p:sp>
-        <p:nvSpPr>
-          <p:cNvPr id="44" name="Text 42"/>
-          <p:cNvSpPr txBox="1"/>
-          <p:nvPr/>
-        </p:nvSpPr>
-        <p:spPr>
-          <a:xfrm>
-            <a:off x="777240" y="5669280"/>
-            <a:ext cx="10607040" cy="594360"/>
-          </a:xfrm>
-          <a:prstGeom prst="rect">
-            <a:avLst/>
-          </a:prstGeom>
-          <a:noFill/>
-          <a:ln/>
-        </p:spPr>
-        <p:txBody>
-          <a:bodyPr wrap="square" rtlCol="0" anchor="ctr"/>
-          <a:lstStyle/>
-          <a:p>
-            <a:r>
-              <a:rPr lang="en-US" sz="1050" b="1" dirty="0">
-                <a:solidFill>
-                  <a:srgbClr val="1E2761"/>
-                </a:solidFill>
-                <a:latin typeface="Calibri" pitchFamily="34" charset="0"/>
-                <a:ea typeface="Calibri" pitchFamily="34" charset="-122"/>
-                <a:cs typeface="Calibri" pitchFamily="34" charset="-120"/>
-              </a:rPr>
-              <a:t>+ 2 indicadores complementarios (validación cruzada):  </a:t>
-            </a:r>
-            <a:r>
-              <a:rPr lang="en-US" sz="1050" dirty="0">
-                <a:solidFill>
-                  <a:srgbClr val="5B6584"/>
-                </a:solidFill>
-                <a:latin typeface="Calibri" pitchFamily="34" charset="0"/>
-                <a:ea typeface="Calibri" pitchFamily="34" charset="-122"/>
-                <a:cs typeface="Calibri" pitchFamily="34" charset="-120"/>
-              </a:rPr>
-              <a:t>MRC Mensual Generado ($) — vista de ingreso, no solo unidades  ·  Concentración Top 3 — % del resultado del centro que depende de sus 3 mejores </a:t>
-            </a:r>
-            <a:r>
-              <a:rPr lang="en-US" sz="1050" dirty="0" err="1">
-                <a:solidFill>
-                  <a:srgbClr val="5B6584"/>
-                </a:solidFill>
-                <a:latin typeface="Calibri" pitchFamily="34" charset="0"/>
-                <a:ea typeface="Calibri" pitchFamily="34" charset="-122"/>
-                <a:cs typeface="Calibri" pitchFamily="34" charset="-120"/>
-              </a:rPr>
-              <a:t>vendedores</a:t>
-            </a:r>
-            <a:r>
-              <a:rPr lang="en-US" sz="1050" dirty="0">
-                <a:solidFill>
-                  <a:srgbClr val="5B6584"/>
-                </a:solidFill>
-                <a:latin typeface="Calibri" pitchFamily="34" charset="0"/>
-                <a:ea typeface="Calibri" pitchFamily="34" charset="-122"/>
-                <a:cs typeface="Calibri" pitchFamily="34" charset="-120"/>
-              </a:rPr>
-              <a:t>. // </a:t>
-            </a:r>
-            <a:r>
-              <a:rPr lang="es-EC" sz="1050" dirty="0"/>
-              <a:t>La meta se fija solo por volumen. ¿No debería ponderar también ingreso/rentabilidad</a:t>
-            </a:r>
-            <a:endParaRPr lang="en-US" sz="1050" dirty="0"/>
-          </a:p>
-        </p:txBody>
-      </p:sp>
-      <p:sp>
-        <p:nvSpPr>
           <p:cNvPr id="45" name="Text 43"/>
           <p:cNvSpPr txBox="1"/>
           <p:nvPr/>
@@ -23597,6 +24024,49 @@
                 <a:cs typeface="Calibri" pitchFamily="34" charset="-120"/>
               </a:rPr>
               <a:t>Factor: 0.70 si cumplimiento &lt;70%  ·  1.00 si 70–99%  ·  1.15 (bono) si ≥100%</a:t>
+            </a:r>
+            <a:br>
+              <a:rPr lang="en-US" sz="1050" i="1" dirty="0">
+                <a:solidFill>
+                  <a:srgbClr val="5B6584"/>
+                </a:solidFill>
+                <a:latin typeface="Calibri" pitchFamily="34" charset="0"/>
+                <a:ea typeface="Calibri" pitchFamily="34" charset="-122"/>
+                <a:cs typeface="Calibri" pitchFamily="34" charset="-120"/>
+              </a:rPr>
+            </a:br>
+            <a:r>
+              <a:rPr lang="en-US" sz="1050" i="1" dirty="0">
+                <a:solidFill>
+                  <a:srgbClr val="5B6584"/>
+                </a:solidFill>
+                <a:latin typeface="Calibri" pitchFamily="34" charset="0"/>
+                <a:ea typeface="Calibri" pitchFamily="34" charset="-122"/>
+                <a:cs typeface="Calibri" pitchFamily="34" charset="-120"/>
+              </a:rPr>
+              <a:t>L</a:t>
+            </a:r>
+            <a:r>
+              <a:rPr lang="es-MX" sz="1050" i="1" dirty="0" err="1">
+                <a:solidFill>
+                  <a:srgbClr val="5B6584"/>
+                </a:solidFill>
+                <a:latin typeface="Calibri" pitchFamily="34" charset="0"/>
+                <a:ea typeface="Calibri" pitchFamily="34" charset="-122"/>
+                <a:cs typeface="Calibri" pitchFamily="34" charset="-120"/>
+              </a:rPr>
+              <a:t>ógica</a:t>
+            </a:r>
+            <a:r>
+              <a:rPr lang="es-MX" sz="1050" i="1" dirty="0">
+                <a:solidFill>
+                  <a:srgbClr val="5B6584"/>
+                </a:solidFill>
+                <a:latin typeface="Calibri" pitchFamily="34" charset="0"/>
+                <a:ea typeface="Calibri" pitchFamily="34" charset="-122"/>
+                <a:cs typeface="Calibri" pitchFamily="34" charset="-120"/>
+              </a:rPr>
+              <a:t> estándar que se usa en casi cualquier esquema de comisiones por metas</a:t>
             </a:r>
             <a:endParaRPr lang="en-US" sz="1050" dirty="0"/>
           </a:p>
